--- a/Lab_4/assets/Lab4_G1.pptx
+++ b/Lab_4/assets/Lab4_G1.pptx
@@ -217,7 +217,7 @@
           <a:p>
             <a:fld id="{F5049794-C84E-4082-8D4E-5398E1A45EA7}" type="datetimeFigureOut">
               <a:rPr lang="en-US" smtClean="0"/>
-              <a:t>9/20/2025</a:t>
+              <a:t>05-Oct-25</a:t>
             </a:fld>
             <a:endParaRPr lang="en-US"/>
           </a:p>
@@ -631,7 +631,7 @@
           <a:p>
             <a:fld id="{5871C1B8-AD85-425D-A891-7F7F61302E2F}" type="datetime1">
               <a:rPr lang="en-US" smtClean="0"/>
-              <a:t>9/20/2025</a:t>
+              <a:t>05-Oct-25</a:t>
             </a:fld>
             <a:endParaRPr lang="en-US"/>
           </a:p>
@@ -829,7 +829,7 @@
           <a:p>
             <a:fld id="{20FF004B-D373-4ACF-8E4D-48BE0C605F2C}" type="datetime1">
               <a:rPr lang="en-US" smtClean="0"/>
-              <a:t>9/20/2025</a:t>
+              <a:t>05-Oct-25</a:t>
             </a:fld>
             <a:endParaRPr lang="en-US"/>
           </a:p>
@@ -1037,7 +1037,7 @@
           <a:p>
             <a:fld id="{11975FD9-FC47-40E4-9D7D-6C72459C26E6}" type="datetime1">
               <a:rPr lang="en-US" smtClean="0"/>
-              <a:t>9/20/2025</a:t>
+              <a:t>05-Oct-25</a:t>
             </a:fld>
             <a:endParaRPr lang="en-US"/>
           </a:p>
@@ -1257,7 +1257,7 @@
           <a:p>
             <a:fld id="{85A7C1C3-5378-46F6-AA21-02B58FE971C6}" type="datetime1">
               <a:rPr lang="en-US" smtClean="0"/>
-              <a:t>9/20/2025</a:t>
+              <a:t>05-Oct-25</a:t>
             </a:fld>
             <a:endParaRPr lang="en-US"/>
           </a:p>
@@ -1617,7 +1617,7 @@
           <a:p>
             <a:fld id="{B49A1A5E-9C33-4F86-80D9-4BAED0911429}" type="datetime1">
               <a:rPr lang="en-US" smtClean="0"/>
-              <a:t>9/20/2025</a:t>
+              <a:t>05-Oct-25</a:t>
             </a:fld>
             <a:endParaRPr lang="en-US"/>
           </a:p>
@@ -1882,7 +1882,7 @@
           <a:p>
             <a:fld id="{CAA102CB-F384-4A4C-82B8-79D60BFA27C5}" type="datetime1">
               <a:rPr lang="en-US" smtClean="0"/>
-              <a:t>9/20/2025</a:t>
+              <a:t>05-Oct-25</a:t>
             </a:fld>
             <a:endParaRPr lang="en-US"/>
           </a:p>
@@ -2294,7 +2294,7 @@
           <a:p>
             <a:fld id="{16011134-CF07-4806-AC2D-C4CF86D8AF9B}" type="datetime1">
               <a:rPr lang="en-US" smtClean="0"/>
-              <a:t>9/20/2025</a:t>
+              <a:t>05-Oct-25</a:t>
             </a:fld>
             <a:endParaRPr lang="en-US"/>
           </a:p>
@@ -2435,7 +2435,7 @@
           <a:p>
             <a:fld id="{E3767434-8F23-4DD5-BD51-853123BE4FA3}" type="datetime1">
               <a:rPr lang="en-US" smtClean="0"/>
-              <a:t>9/20/2025</a:t>
+              <a:t>05-Oct-25</a:t>
             </a:fld>
             <a:endParaRPr lang="en-US"/>
           </a:p>
@@ -2548,7 +2548,7 @@
           <a:p>
             <a:fld id="{594F706E-2165-4BB6-98D7-C9EE277D9AF2}" type="datetime1">
               <a:rPr lang="en-US" smtClean="0"/>
-              <a:t>9/20/2025</a:t>
+              <a:t>05-Oct-25</a:t>
             </a:fld>
             <a:endParaRPr lang="en-US"/>
           </a:p>
@@ -2859,7 +2859,7 @@
           <a:p>
             <a:fld id="{9C8749A3-5F0E-45E0-B660-E2BE0FDEF0DF}" type="datetime1">
               <a:rPr lang="en-US" smtClean="0"/>
-              <a:t>9/20/2025</a:t>
+              <a:t>05-Oct-25</a:t>
             </a:fld>
             <a:endParaRPr lang="en-US"/>
           </a:p>
@@ -3147,7 +3147,7 @@
           <a:p>
             <a:fld id="{1C0F3D22-82D8-46A7-A4C0-7A6FA54084BE}" type="datetime1">
               <a:rPr lang="en-US" smtClean="0"/>
-              <a:t>9/20/2025</a:t>
+              <a:t>05-Oct-25</a:t>
             </a:fld>
             <a:endParaRPr lang="en-US"/>
           </a:p>
@@ -3388,7 +3388,7 @@
           <a:p>
             <a:fld id="{64B2897B-F47E-49C0-A30B-118D7B86E5F3}" type="datetime1">
               <a:rPr lang="en-US" smtClean="0"/>
-              <a:t>9/20/2025</a:t>
+              <a:t>05-Oct-25</a:t>
             </a:fld>
             <a:endParaRPr lang="en-US"/>
           </a:p>
@@ -3939,18 +3939,6 @@
               </a:rPr>
             </a:br>
             <a:r>
-              <a:rPr lang="en-US" sz="2400" u="sng">
-                <a:solidFill>
-                  <a:schemeClr val="accent1">
-                    <a:lumMod val="75000"/>
-                  </a:schemeClr>
-                </a:solidFill>
-                <a:latin typeface="Times New Roman" panose="02020603050405020304" pitchFamily="18" charset="0"/>
-                <a:cs typeface="Times New Roman" panose="02020603050405020304" pitchFamily="18" charset="0"/>
-              </a:rPr>
-              <a:t>Week 4: </a:t>
-            </a:r>
-            <a:r>
               <a:rPr lang="en-US" sz="2400" u="sng" dirty="0">
                 <a:solidFill>
                   <a:schemeClr val="accent1">
@@ -3960,7 +3948,7 @@
                 <a:latin typeface="Times New Roman" panose="02020603050405020304" pitchFamily="18" charset="0"/>
                 <a:cs typeface="Times New Roman" panose="02020603050405020304" pitchFamily="18" charset="0"/>
               </a:rPr>
-              <a:t>Region Descriptors and Feature Matching </a:t>
+              <a:t>Week 4: Region Descriptors and Feature Matching </a:t>
             </a:r>
           </a:p>
         </p:txBody>
@@ -6797,24 +6785,6 @@
               <a:rPr lang="en-US" dirty="0"/>
               <a:t>Take a small 5x5 image patch from any of your input image. Apply the above mention operations and demonstrate in your report.</a:t>
             </a:r>
-          </a:p>
-          <a:p>
-            <a:pPr marL="914400" lvl="2" indent="0">
-              <a:buNone/>
-            </a:pPr>
-            <a:endParaRPr lang="en-US" dirty="0"/>
-          </a:p>
-          <a:p>
-            <a:pPr marL="914400" lvl="2" indent="0">
-              <a:buNone/>
-            </a:pPr>
-            <a:endParaRPr lang="en-US" dirty="0"/>
-          </a:p>
-          <a:p>
-            <a:pPr marL="914400" lvl="2" indent="0">
-              <a:buNone/>
-            </a:pPr>
-            <a:endParaRPr lang="en-US" dirty="0"/>
           </a:p>
         </p:txBody>
       </p:sp>
